--- a/public/fun/pack/pptx/familypro/가족소개프리미엄_33_3대가족_와인로즈.pptx
+++ b/public/fun/pack/pptx/familypro/가족소개프리미엄_33_3대가족_와인로즈.pptx
@@ -113,12 +113,12 @@
   <p:extLst>
     <p:ext uri="{521415D9-36F7-43E2-AB2F-B90AF26B5E84}">
       <p14:sectionLst xmlns:p14="http://schemas.microsoft.com/office/powerpoint/2010/main">
-        <p14:section name="시작" id="{8099FB7E-353E-4118-B488-F51A1D501903}">
+        <p14:section name="시작" id="{848146A6-E850-4D9C-BBC0-0EB45AAF5B66}">
           <p14:sldIdLst>
             <p14:sldId id="256"/>
           </p14:sldIdLst>
         </p14:section>
-        <p14:section name="본문" id="{384DE731-E8FC-4ACE-A3A4-0543DB49E83E}">
+        <p14:section name="본문" id="{0401A6FF-5BAD-4EAD-9A3C-05128A8F6A60}">
           <p14:sldIdLst>
             <p14:sldId id="257"/>
             <p14:sldId id="258"/>
@@ -127,7 +127,7 @@
             <p14:sldId id="261"/>
           </p14:sldIdLst>
         </p14:section>
-        <p14:section name="마무리" id="{6E643DAA-3F28-43D4-8C18-29593FAC8659}">
+        <p14:section name="마무리" id="{B1164F48-F724-4B09-A311-CE1FD1E6B7CA}">
           <p14:sldIdLst>
             <p14:sldId id="262"/>
           </p14:sldIdLst>
@@ -1518,7 +1518,7 @@
             </a:lvl1pPr>
           </a:lstStyle>
           <a:p>
-            <a:fld id="{E8B54679-F099-457D-AADC-07C84F173CDF}" type="slidenum">
+            <a:fld id="{C38465A6-D7A1-4FAB-BF78-FC6BC5319EA8}" type="slidenum">
               <a:rPr lang="en-US"/>
               <a:t>‹#›</a:t>
             </a:fld>
@@ -2244,7 +2244,7 @@
             </a:lvl1pPr>
           </a:lstStyle>
           <a:p>
-            <a:fld id="{45802DC4-B128-46CC-BA98-F54B21DE39B0}" type="slidenum">
+            <a:fld id="{63F22C87-D859-4671-B8B6-170062BC8E39}" type="slidenum">
               <a:rPr lang="en-US"/>
               <a:t>‹#›</a:t>
             </a:fld>
@@ -2932,7 +2932,7 @@
             </a:lvl1pPr>
           </a:lstStyle>
           <a:p>
-            <a:fld id="{3E17D181-EAEA-4327-8279-7EC653B65F71}" type="slidenum">
+            <a:fld id="{CF5E5DCF-AE18-4118-80AE-0ED7D9D6E511}" type="slidenum">
               <a:rPr lang="en-US"/>
               <a:t>‹#›</a:t>
             </a:fld>
@@ -3865,7 +3865,7 @@
           <a:p>
             <a:r>
               <a:rPr lang="ko-KR"/>
-              <a:t>3대 가족 · 0000. 00. 00</a:t>
+              <a:t>3대 가족 · 날짜 입력</a:t>
             </a:r>
           </a:p>
         </p:txBody>
@@ -4400,7 +4400,7 @@
           <a:bodyPr/>
           <a:lstStyle/>
           <a:p>
-            <a:fld id="{7A297D95-2643-4DE6-810C-625981C73899}" type="slidenum">
+            <a:fld id="{AFB00A62-33E3-4646-B0B9-C63799A526B1}" type="slidenum">
               <a:rPr lang="en-US"/>
               <a:t>‹#›</a:t>
             </a:fld>
@@ -5442,7 +5442,7 @@
           <a:bodyPr/>
           <a:lstStyle/>
           <a:p>
-            <a:fld id="{500522C3-A2DC-40C6-96E4-F974BDAEF21C}" type="slidenum">
+            <a:fld id="{D85E2645-D410-414B-989D-3F781ED67D4B}" type="slidenum">
               <a:rPr lang="en-US"/>
               <a:t>‹#›</a:t>
             </a:fld>
@@ -6284,7 +6284,7 @@
           <a:bodyPr/>
           <a:lstStyle/>
           <a:p>
-            <a:fld id="{3A9BA6CF-172C-4A7A-B66B-B19F02655BA0}" type="slidenum">
+            <a:fld id="{ACA683E7-44BA-4867-947B-16F491136D08}" type="slidenum">
               <a:rPr lang="en-US"/>
               <a:t>‹#›</a:t>
             </a:fld>
@@ -7539,7 +7539,7 @@
           <a:bodyPr/>
           <a:lstStyle/>
           <a:p>
-            <a:fld id="{82CF367E-6B99-4ACA-914F-F2150C84F3A8}" type="slidenum">
+            <a:fld id="{FEFFC22D-C445-4E6F-9DFD-14E8CD629717}" type="slidenum">
               <a:rPr lang="en-US"/>
               <a:t>‹#›</a:t>
             </a:fld>
@@ -7627,7 +7627,7 @@
           <a:bodyPr/>
           <a:lstStyle/>
           <a:p>
-            <a:fld id="{0FB3FECF-C4A7-4AE3-AE2B-77A084C9E4B1}" type="slidenum">
+            <a:fld id="{0C15E15C-55B0-40DF-9BC4-413CBF45906E}" type="slidenum">
               <a:rPr lang="en-US"/>
               <a:t>‹#›</a:t>
             </a:fld>
